--- a/docs/stakeholder/OpenOKR-Deck.pptx
+++ b/docs/stakeholder/OpenOKR-Deck.pptx
@@ -3203,7 +3203,7 @@
                           <a:latin typeface="Calibri"/>
                           <a:cs typeface="Calibri"/>
                         </a:rPr>
-                        <a:t>Write objectives and key results, twenty rules checking live</a:t>
+                        <a:t>Write objectives and key results, the quality checks judging live</a:t>
                       </a:r>
                     </a:p>
                   </a:txBody>
@@ -3775,7 +3775,7 @@
                 <a:latin typeface="Calibri Light"/>
                 <a:cs typeface="Calibri Light"/>
               </a:rPr>
-              <a:t>Twenty rules, running on every keystroke</a:t>
+              <a:t>Twenty-six checks, running on every keystroke</a:t>
             </a:r>
           </a:p>
         </p:txBody>
@@ -16202,7 +16202,7 @@
                 <a:latin typeface="Calibri"/>
                 <a:cs typeface="Calibri"/>
               </a:rPr>
-              <a:t>Eight phases, 104 scoped tasks, each with acceptance criteria and a test plan.</a:t>
+              <a:t>Eight phases, 200 scoped tasks, each with acceptance criteria and a test plan. All delivered.</a:t>
             </a:r>
           </a:p>
         </p:txBody>
@@ -18048,7 +18048,7 @@
                 <a:latin typeface="Calibri"/>
                 <a:cs typeface="Calibri"/>
               </a:rPr>
-              <a:t>The warn-versus-fail line on all twenty rules will be tuned against a corpus of real, anonymised OKRs before launch. Assembling that corpus is a named deliverable of the coaching phase design gate, not an afterthought.</a:t>
+              <a:t>The warn-versus-fail line on every check will be tuned against a corpus of real, anonymised OKRs before launch. Assembling that corpus is a named deliverable of the coaching phase design gate, not an afterthought.</a:t>
             </a:r>
           </a:p>
         </p:txBody>
@@ -19832,7 +19832,7 @@
                 <a:latin typeface="Calibri"/>
                 <a:cs typeface="Calibri"/>
               </a:rPr>
-              <a:t>The full planning set behind this deck is available on request: requirements, architecture, the method canon, the schema, forty screen specifications and 104 tasks.</a:t>
+              <a:t>The full planning set behind this deck is available on request: requirements, architecture, the method canon, the schema, forty screen specifications and 200 tasks.</a:t>
             </a:r>
           </a:p>
         </p:txBody>
@@ -22829,7 +22829,7 @@
                 <a:latin typeface="Calibri"/>
                 <a:cs typeface="Calibri"/>
               </a:rPr>
-              <a:t>Reviews every draft against the twenty rules. Runs a nightly semantic sweep for duplicated metrics, better parents and hidden dependencies.
+              <a:t>Reviews every draft against the quality checks. Runs a nightly semantic sweep for duplicated metrics, better parents and hidden dependencies.
 Speaks up when the not-doing list is empty, when nothing was cut at the capacity check, when a goal is reported on track but its key results have not moved in a month, and when the scores cluster suspiciously near perfect at the close.</a:t>
             </a:r>
           </a:p>
